--- a/marketing/decks/phase-03-project-memory.pptx
+++ b/marketing/decks/phase-03-project-memory.pptx
@@ -2,30 +2,30 @@
 <file path=ppt/presentation.xml><?xml version="1.0" encoding="utf-8"?>
 <p:presentation xmlns:p="http://schemas.openxmlformats.org/presentationml/2006/main">
   <p:sldMasterIdLst>
-    <p:sldMasterId xmlns:r="http://schemas.openxmlformats.org/officeDocument/2006/relationships" id="2147483648" r:id="R9b7b335654df4bf0"/>
+    <p:sldMasterId xmlns:r="http://schemas.openxmlformats.org/officeDocument/2006/relationships" id="2147483648" r:id="Rf90c2bb783b14846"/>
   </p:sldMasterIdLst>
   <p:notesMasterIdLst>
-    <p:notesMasterId xmlns:r="http://schemas.openxmlformats.org/officeDocument/2006/relationships" r:id="R3385b85fe2ad47df"/>
+    <p:notesMasterId xmlns:r="http://schemas.openxmlformats.org/officeDocument/2006/relationships" r:id="R0d20c268baa043a1"/>
   </p:notesMasterIdLst>
   <p:sldIdLst>
-    <p:sldId xmlns:r="http://schemas.openxmlformats.org/officeDocument/2006/relationships" id="256" r:id="R91a97e1eb1b04451"/>
-    <p:sldId xmlns:r="http://schemas.openxmlformats.org/officeDocument/2006/relationships" id="257" r:id="Rb3141807e4614a48"/>
-    <p:sldId xmlns:r="http://schemas.openxmlformats.org/officeDocument/2006/relationships" id="258" r:id="R451e559511cb4bb6"/>
-    <p:sldId xmlns:r="http://schemas.openxmlformats.org/officeDocument/2006/relationships" id="259" r:id="R24d895cbee074195"/>
-    <p:sldId xmlns:r="http://schemas.openxmlformats.org/officeDocument/2006/relationships" id="260" r:id="R09d218a58a6740c7"/>
-    <p:sldId xmlns:r="http://schemas.openxmlformats.org/officeDocument/2006/relationships" id="261" r:id="Rb2f74214344c4eee"/>
-    <p:sldId xmlns:r="http://schemas.openxmlformats.org/officeDocument/2006/relationships" id="262" r:id="R3185086dfbc1488c"/>
-    <p:sldId xmlns:r="http://schemas.openxmlformats.org/officeDocument/2006/relationships" id="263" r:id="Rdf939dc1978c4bdf"/>
-    <p:sldId xmlns:r="http://schemas.openxmlformats.org/officeDocument/2006/relationships" id="264" r:id="Raec5c39f166e4175"/>
-    <p:sldId xmlns:r="http://schemas.openxmlformats.org/officeDocument/2006/relationships" id="265" r:id="R6842f2448bf24617"/>
-    <p:sldId xmlns:r="http://schemas.openxmlformats.org/officeDocument/2006/relationships" id="266" r:id="Ree30f85a3b97443e"/>
-    <p:sldId xmlns:r="http://schemas.openxmlformats.org/officeDocument/2006/relationships" id="267" r:id="Rc011ba162dcc45a9"/>
-    <p:sldId xmlns:r="http://schemas.openxmlformats.org/officeDocument/2006/relationships" id="268" r:id="R34c7c3a6cddd4670"/>
-    <p:sldId xmlns:r="http://schemas.openxmlformats.org/officeDocument/2006/relationships" id="269" r:id="R15dd4e5ca53c4341"/>
-    <p:sldId xmlns:r="http://schemas.openxmlformats.org/officeDocument/2006/relationships" id="270" r:id="Re21a81329d9046a6"/>
-    <p:sldId xmlns:r="http://schemas.openxmlformats.org/officeDocument/2006/relationships" id="271" r:id="R684a34643e614d8b"/>
-    <p:sldId xmlns:r="http://schemas.openxmlformats.org/officeDocument/2006/relationships" id="272" r:id="Rf2dfc1f3cc7d469e"/>
-    <p:sldId xmlns:r="http://schemas.openxmlformats.org/officeDocument/2006/relationships" id="273" r:id="Rc1f9c30451284888"/>
+    <p:sldId xmlns:r="http://schemas.openxmlformats.org/officeDocument/2006/relationships" id="256" r:id="R85cf8cc7cb1c4f19"/>
+    <p:sldId xmlns:r="http://schemas.openxmlformats.org/officeDocument/2006/relationships" id="257" r:id="Rdbbf37696994420d"/>
+    <p:sldId xmlns:r="http://schemas.openxmlformats.org/officeDocument/2006/relationships" id="258" r:id="R9127edca30f941e6"/>
+    <p:sldId xmlns:r="http://schemas.openxmlformats.org/officeDocument/2006/relationships" id="259" r:id="Rd5015238416c4756"/>
+    <p:sldId xmlns:r="http://schemas.openxmlformats.org/officeDocument/2006/relationships" id="260" r:id="R77f0dbd981344760"/>
+    <p:sldId xmlns:r="http://schemas.openxmlformats.org/officeDocument/2006/relationships" id="261" r:id="R6b971fe1f9144a2d"/>
+    <p:sldId xmlns:r="http://schemas.openxmlformats.org/officeDocument/2006/relationships" id="262" r:id="Rb3173cfcc7e64f0a"/>
+    <p:sldId xmlns:r="http://schemas.openxmlformats.org/officeDocument/2006/relationships" id="263" r:id="R305bed7748ae48c9"/>
+    <p:sldId xmlns:r="http://schemas.openxmlformats.org/officeDocument/2006/relationships" id="264" r:id="Rbba2620e23274ff8"/>
+    <p:sldId xmlns:r="http://schemas.openxmlformats.org/officeDocument/2006/relationships" id="265" r:id="R85bcbd418e914dcb"/>
+    <p:sldId xmlns:r="http://schemas.openxmlformats.org/officeDocument/2006/relationships" id="266" r:id="R801873dc76974264"/>
+    <p:sldId xmlns:r="http://schemas.openxmlformats.org/officeDocument/2006/relationships" id="267" r:id="R8a57e9810c2f4f36"/>
+    <p:sldId xmlns:r="http://schemas.openxmlformats.org/officeDocument/2006/relationships" id="268" r:id="R1170fb97a44848c3"/>
+    <p:sldId xmlns:r="http://schemas.openxmlformats.org/officeDocument/2006/relationships" id="269" r:id="R4588be3b551848e2"/>
+    <p:sldId xmlns:r="http://schemas.openxmlformats.org/officeDocument/2006/relationships" id="270" r:id="R8165ccc230f742c1"/>
+    <p:sldId xmlns:r="http://schemas.openxmlformats.org/officeDocument/2006/relationships" id="271" r:id="R63e9d5fecf1d4108"/>
+    <p:sldId xmlns:r="http://schemas.openxmlformats.org/officeDocument/2006/relationships" id="272" r:id="Rffb210f9d7e048ad"/>
+    <p:sldId xmlns:r="http://schemas.openxmlformats.org/officeDocument/2006/relationships" id="273" r:id="R9a3f439c1cc14e1c"/>
   </p:sldIdLst>
   <p:sldSz cx="12192000" cy="6858000"/>
   <p:notesSz cx="6858000" cy="9144000"/>
@@ -4988,17 +4988,17 @@
   </p:cSld>
   <p:clrMap bg1="lt1" tx1="dk1" bg2="lt2" tx2="dk2" accent1="accent1" accent2="accent2" accent3="accent3" accent4="accent4" accent5="accent5" accent6="accent6" hlink="hlink" folHlink="folHlink"/>
   <p:sldLayoutIdLst>
-    <p:sldLayoutId xmlns:r="http://schemas.openxmlformats.org/officeDocument/2006/relationships" id="2147483649" r:id="R786a2a7c4cfb4c3e"/>
-    <p:sldLayoutId xmlns:r="http://schemas.openxmlformats.org/officeDocument/2006/relationships" id="2147483650" r:id="Raa57f96cf5ed4c2f"/>
-    <p:sldLayoutId xmlns:r="http://schemas.openxmlformats.org/officeDocument/2006/relationships" id="2147483651" r:id="R88f17db2bbe443c4"/>
-    <p:sldLayoutId xmlns:r="http://schemas.openxmlformats.org/officeDocument/2006/relationships" id="2147483652" r:id="Rfb01c9fea7f44378"/>
-    <p:sldLayoutId xmlns:r="http://schemas.openxmlformats.org/officeDocument/2006/relationships" id="2147483653" r:id="Rf34e837b4dd04f4e"/>
-    <p:sldLayoutId xmlns:r="http://schemas.openxmlformats.org/officeDocument/2006/relationships" id="2147483654" r:id="R68d3b501691b4dc8"/>
-    <p:sldLayoutId xmlns:r="http://schemas.openxmlformats.org/officeDocument/2006/relationships" id="2147483655" r:id="R44f6c88e44bf4ee2"/>
-    <p:sldLayoutId xmlns:r="http://schemas.openxmlformats.org/officeDocument/2006/relationships" id="2147483656" r:id="R468d5d4a3c33480b"/>
-    <p:sldLayoutId xmlns:r="http://schemas.openxmlformats.org/officeDocument/2006/relationships" id="2147483657" r:id="R69cd1dcfcb3041b5"/>
-    <p:sldLayoutId xmlns:r="http://schemas.openxmlformats.org/officeDocument/2006/relationships" id="2147483658" r:id="R62036bbf138d48c3"/>
-    <p:sldLayoutId xmlns:r="http://schemas.openxmlformats.org/officeDocument/2006/relationships" id="2147483659" r:id="R0eed7c9aa21243b0"/>
+    <p:sldLayoutId xmlns:r="http://schemas.openxmlformats.org/officeDocument/2006/relationships" id="2147483649" r:id="R8d51aa7a935a4f00"/>
+    <p:sldLayoutId xmlns:r="http://schemas.openxmlformats.org/officeDocument/2006/relationships" id="2147483650" r:id="Rd689f56d83004140"/>
+    <p:sldLayoutId xmlns:r="http://schemas.openxmlformats.org/officeDocument/2006/relationships" id="2147483651" r:id="Rc6228463e5a44dc9"/>
+    <p:sldLayoutId xmlns:r="http://schemas.openxmlformats.org/officeDocument/2006/relationships" id="2147483652" r:id="Rae8107f9f31e465e"/>
+    <p:sldLayoutId xmlns:r="http://schemas.openxmlformats.org/officeDocument/2006/relationships" id="2147483653" r:id="Rd5a8f7ac8d9b46f6"/>
+    <p:sldLayoutId xmlns:r="http://schemas.openxmlformats.org/officeDocument/2006/relationships" id="2147483654" r:id="R9be190177bd54ee3"/>
+    <p:sldLayoutId xmlns:r="http://schemas.openxmlformats.org/officeDocument/2006/relationships" id="2147483655" r:id="Rbb8523bf8d324e3b"/>
+    <p:sldLayoutId xmlns:r="http://schemas.openxmlformats.org/officeDocument/2006/relationships" id="2147483656" r:id="Rcd554448763349c0"/>
+    <p:sldLayoutId xmlns:r="http://schemas.openxmlformats.org/officeDocument/2006/relationships" id="2147483657" r:id="R40c7bf0b9c9645e3"/>
+    <p:sldLayoutId xmlns:r="http://schemas.openxmlformats.org/officeDocument/2006/relationships" id="2147483658" r:id="Rf07d0ad46f5f4fa1"/>
+    <p:sldLayoutId xmlns:r="http://schemas.openxmlformats.org/officeDocument/2006/relationships" id="2147483659" r:id="Rf4c51df296db44ee"/>
   </p:sldLayoutIdLst>
   <p:txStyles>
     <p:titleStyle>
@@ -5917,10 +5917,14 @@
           <a:lstStyle xmlns:a="http://schemas.openxmlformats.org/drawingml/2006/main"/>
           <a:p xmlns:a="http://schemas.openxmlformats.org/drawingml/2006/main">
             <a:pPr algn="l">
-              <a:buNone/>
-            </a:pPr>
-            <a:r>
-              <a:rPr sz="3750" b="1">
+              <a:lnSpc>
+                <a:spcPct val="98000"/>
+              </a:lnSpc>
+              <a:buNone/>
+              <a:defRPr sz="3525" b="1"/>
+            </a:pPr>
+            <a:r>
+              <a:rPr sz="3525" b="1">
                 <a:solidFill>
                   <a:srgbClr val="000000"/>
                 </a:solidFill>
@@ -5949,7 +5953,7 @@
         </p:nvSpPr>
         <p:spPr>
           <a:xfrm xmlns:a="http://schemas.openxmlformats.org/drawingml/2006/main">
-            <a:off x="-76200" y="3314700"/>
+            <a:off x="114300" y="3314700"/>
             <a:ext cx="1981200" cy="1504950"/>
           </a:xfrm>
           <a:prstGeom xmlns:a="http://schemas.openxmlformats.org/drawingml/2006/main" prst="rect">
@@ -6004,7 +6008,7 @@
         </p:nvSpPr>
         <p:spPr>
           <a:xfrm xmlns:a="http://schemas.openxmlformats.org/drawingml/2006/main">
-            <a:off x="19050" y="3694700"/>
+            <a:off x="209550" y="3694700"/>
             <a:ext cx="1790700" cy="400050"/>
           </a:xfrm>
           <a:prstGeom xmlns:a="http://schemas.openxmlformats.org/drawingml/2006/main" prst="rect">
@@ -6019,10 +6023,14 @@
           <a:lstStyle xmlns:a="http://schemas.openxmlformats.org/drawingml/2006/main"/>
           <a:p xmlns:a="http://schemas.openxmlformats.org/drawingml/2006/main">
             <a:pPr algn="ctr">
-              <a:buNone/>
-            </a:pPr>
-            <a:r>
-              <a:rPr sz="2000" b="1">
+              <a:lnSpc>
+                <a:spcPct val="108000"/>
+              </a:lnSpc>
+              <a:buNone/>
+              <a:defRPr sz="1725" b="1"/>
+            </a:pPr>
+            <a:r>
+              <a:rPr sz="1725" b="1">
                 <a:solidFill>
                   <a:srgbClr val="000000"/>
                 </a:solidFill>
@@ -6051,7 +6059,7 @@
         </p:nvSpPr>
         <p:spPr>
           <a:xfrm xmlns:a="http://schemas.openxmlformats.org/drawingml/2006/main">
-            <a:off x="19050" y="4114800"/>
+            <a:off x="209550" y="4114800"/>
             <a:ext cx="1790700" cy="500000"/>
           </a:xfrm>
           <a:prstGeom xmlns:a="http://schemas.openxmlformats.org/drawingml/2006/main" prst="rect">
@@ -6066,7 +6074,11 @@
           <a:lstStyle xmlns:a="http://schemas.openxmlformats.org/drawingml/2006/main"/>
           <a:p xmlns:a="http://schemas.openxmlformats.org/drawingml/2006/main">
             <a:pPr algn="ctr">
-              <a:buNone/>
+              <a:lnSpc>
+                <a:spcPct val="108000"/>
+              </a:lnSpc>
+              <a:buNone/>
+              <a:defRPr sz="1350" b="0"/>
             </a:pPr>
             <a:r>
               <a:rPr sz="1350" b="0">
@@ -6223,10 +6235,14 @@
           <a:lstStyle xmlns:a="http://schemas.openxmlformats.org/drawingml/2006/main"/>
           <a:p xmlns:a="http://schemas.openxmlformats.org/drawingml/2006/main">
             <a:pPr algn="ctr">
-              <a:buNone/>
-            </a:pPr>
-            <a:r>
-              <a:rPr sz="2000" b="1">
+              <a:lnSpc>
+                <a:spcPct val="108000"/>
+              </a:lnSpc>
+              <a:buNone/>
+              <a:defRPr sz="1725" b="1"/>
+            </a:pPr>
+            <a:r>
+              <a:rPr sz="1725" b="1">
                 <a:solidFill>
                   <a:srgbClr val="000000"/>
                 </a:solidFill>
@@ -6270,7 +6286,11 @@
           <a:lstStyle xmlns:a="http://schemas.openxmlformats.org/drawingml/2006/main"/>
           <a:p xmlns:a="http://schemas.openxmlformats.org/drawingml/2006/main">
             <a:pPr algn="ctr">
-              <a:buNone/>
+              <a:lnSpc>
+                <a:spcPct val="108000"/>
+              </a:lnSpc>
+              <a:buNone/>
+              <a:defRPr sz="1350" b="0"/>
             </a:pPr>
             <a:r>
               <a:rPr sz="1350" b="0">
@@ -6427,10 +6447,14 @@
           <a:lstStyle xmlns:a="http://schemas.openxmlformats.org/drawingml/2006/main"/>
           <a:p xmlns:a="http://schemas.openxmlformats.org/drawingml/2006/main">
             <a:pPr algn="ctr">
-              <a:buNone/>
-            </a:pPr>
-            <a:r>
-              <a:rPr sz="2000" b="1">
+              <a:lnSpc>
+                <a:spcPct val="108000"/>
+              </a:lnSpc>
+              <a:buNone/>
+              <a:defRPr sz="1725" b="1"/>
+            </a:pPr>
+            <a:r>
+              <a:rPr sz="1725" b="1">
                 <a:solidFill>
                   <a:srgbClr val="000000"/>
                 </a:solidFill>
@@ -6474,7 +6498,11 @@
           <a:lstStyle xmlns:a="http://schemas.openxmlformats.org/drawingml/2006/main"/>
           <a:p xmlns:a="http://schemas.openxmlformats.org/drawingml/2006/main">
             <a:pPr algn="ctr">
-              <a:buNone/>
+              <a:lnSpc>
+                <a:spcPct val="108000"/>
+              </a:lnSpc>
+              <a:buNone/>
+              <a:defRPr sz="1350" b="0"/>
             </a:pPr>
             <a:r>
               <a:rPr sz="1350" b="0">
@@ -6631,10 +6659,14 @@
           <a:lstStyle xmlns:a="http://schemas.openxmlformats.org/drawingml/2006/main"/>
           <a:p xmlns:a="http://schemas.openxmlformats.org/drawingml/2006/main">
             <a:pPr algn="ctr">
-              <a:buNone/>
-            </a:pPr>
-            <a:r>
-              <a:rPr sz="2000" b="1">
+              <a:lnSpc>
+                <a:spcPct val="108000"/>
+              </a:lnSpc>
+              <a:buNone/>
+              <a:defRPr sz="1725" b="1"/>
+            </a:pPr>
+            <a:r>
+              <a:rPr sz="1725" b="1">
                 <a:solidFill>
                   <a:srgbClr val="000000"/>
                 </a:solidFill>
@@ -6678,7 +6710,11 @@
           <a:lstStyle xmlns:a="http://schemas.openxmlformats.org/drawingml/2006/main"/>
           <a:p xmlns:a="http://schemas.openxmlformats.org/drawingml/2006/main">
             <a:pPr algn="ctr">
-              <a:buNone/>
+              <a:lnSpc>
+                <a:spcPct val="108000"/>
+              </a:lnSpc>
+              <a:buNone/>
+              <a:defRPr sz="1350" b="0"/>
             </a:pPr>
             <a:r>
               <a:rPr sz="1350" b="0">
@@ -6765,7 +6801,7 @@
         </p:nvSpPr>
         <p:spPr>
           <a:xfrm xmlns:a="http://schemas.openxmlformats.org/drawingml/2006/main">
-            <a:off x="10287000" y="3314700"/>
+            <a:off x="10096500" y="3314700"/>
             <a:ext cx="1981200" cy="1504950"/>
           </a:xfrm>
           <a:prstGeom xmlns:a="http://schemas.openxmlformats.org/drawingml/2006/main" prst="rect">
@@ -6820,7 +6856,7 @@
         </p:nvSpPr>
         <p:spPr>
           <a:xfrm xmlns:a="http://schemas.openxmlformats.org/drawingml/2006/main">
-            <a:off x="10382250" y="3694700"/>
+            <a:off x="10191750" y="3694700"/>
             <a:ext cx="1790700" cy="400050"/>
           </a:xfrm>
           <a:prstGeom xmlns:a="http://schemas.openxmlformats.org/drawingml/2006/main" prst="rect">
@@ -6835,10 +6871,14 @@
           <a:lstStyle xmlns:a="http://schemas.openxmlformats.org/drawingml/2006/main"/>
           <a:p xmlns:a="http://schemas.openxmlformats.org/drawingml/2006/main">
             <a:pPr algn="ctr">
-              <a:buNone/>
-            </a:pPr>
-            <a:r>
-              <a:rPr sz="2000" b="1">
+              <a:lnSpc>
+                <a:spcPct val="108000"/>
+              </a:lnSpc>
+              <a:buNone/>
+              <a:defRPr sz="1725" b="1"/>
+            </a:pPr>
+            <a:r>
+              <a:rPr sz="1725" b="1">
                 <a:solidFill>
                   <a:srgbClr val="000000"/>
                 </a:solidFill>
@@ -6867,7 +6907,7 @@
         </p:nvSpPr>
         <p:spPr>
           <a:xfrm xmlns:a="http://schemas.openxmlformats.org/drawingml/2006/main">
-            <a:off x="10382250" y="4114800"/>
+            <a:off x="10191750" y="4114800"/>
             <a:ext cx="1790700" cy="500000"/>
           </a:xfrm>
           <a:prstGeom xmlns:a="http://schemas.openxmlformats.org/drawingml/2006/main" prst="rect">
@@ -6882,7 +6922,11 @@
           <a:lstStyle xmlns:a="http://schemas.openxmlformats.org/drawingml/2006/main"/>
           <a:p xmlns:a="http://schemas.openxmlformats.org/drawingml/2006/main">
             <a:pPr algn="ctr">
-              <a:buNone/>
+              <a:lnSpc>
+                <a:spcPct val="108000"/>
+              </a:lnSpc>
+              <a:buNone/>
+              <a:defRPr sz="1350" b="0"/>
             </a:pPr>
             <a:r>
               <a:rPr sz="1350" b="0">
@@ -6914,8 +6958,8 @@
         </p:nvSpPr>
         <p:spPr>
           <a:xfrm xmlns:a="http://schemas.openxmlformats.org/drawingml/2006/main">
-            <a:off x="1676400" y="5181600"/>
-            <a:ext cx="8839200" cy="600075"/>
+            <a:off x="1676400" y="5448300"/>
+            <a:ext cx="8839200" cy="457200"/>
           </a:xfrm>
           <a:prstGeom xmlns:a="http://schemas.openxmlformats.org/drawingml/2006/main" prst="rect">
             <a:avLst/>
@@ -6929,10 +6973,14 @@
           <a:lstStyle xmlns:a="http://schemas.openxmlformats.org/drawingml/2006/main"/>
           <a:p xmlns:a="http://schemas.openxmlformats.org/drawingml/2006/main">
             <a:pPr algn="ctr">
-              <a:buNone/>
-            </a:pPr>
-            <a:r>
-              <a:rPr sz="2100" b="1">
+              <a:lnSpc>
+                <a:spcPct val="105000"/>
+              </a:lnSpc>
+              <a:buNone/>
+              <a:defRPr sz="1500"/>
+            </a:pPr>
+            <a:r>
+              <a:rPr sz="1500" b="1">
                 <a:solidFill>
                   <a:srgbClr val="000000"/>
                 </a:solidFill>
@@ -7092,10 +7140,14 @@
           <a:lstStyle xmlns:a="http://schemas.openxmlformats.org/drawingml/2006/main"/>
           <a:p xmlns:a="http://schemas.openxmlformats.org/drawingml/2006/main">
             <a:pPr algn="l">
-              <a:buNone/>
-            </a:pPr>
-            <a:r>
-              <a:rPr sz="3750" b="1">
+              <a:lnSpc>
+                <a:spcPct val="98000"/>
+              </a:lnSpc>
+              <a:buNone/>
+              <a:defRPr sz="3525" b="1"/>
+            </a:pPr>
+            <a:r>
+              <a:rPr sz="3525" b="1">
                 <a:solidFill>
                   <a:srgbClr val="000000"/>
                 </a:solidFill>
@@ -7124,7 +7176,7 @@
         </p:nvSpPr>
         <p:spPr>
           <a:xfrm xmlns:a="http://schemas.openxmlformats.org/drawingml/2006/main">
-            <a:off x="-76200" y="3314700"/>
+            <a:off x="114300" y="3314700"/>
             <a:ext cx="1981200" cy="1504950"/>
           </a:xfrm>
           <a:prstGeom xmlns:a="http://schemas.openxmlformats.org/drawingml/2006/main" prst="rect">
@@ -7179,7 +7231,7 @@
         </p:nvSpPr>
         <p:spPr>
           <a:xfrm xmlns:a="http://schemas.openxmlformats.org/drawingml/2006/main">
-            <a:off x="19050" y="3694700"/>
+            <a:off x="209550" y="3694700"/>
             <a:ext cx="1790700" cy="400050"/>
           </a:xfrm>
           <a:prstGeom xmlns:a="http://schemas.openxmlformats.org/drawingml/2006/main" prst="rect">
@@ -7194,10 +7246,14 @@
           <a:lstStyle xmlns:a="http://schemas.openxmlformats.org/drawingml/2006/main"/>
           <a:p xmlns:a="http://schemas.openxmlformats.org/drawingml/2006/main">
             <a:pPr algn="ctr">
-              <a:buNone/>
-            </a:pPr>
-            <a:r>
-              <a:rPr sz="2000" b="1">
+              <a:lnSpc>
+                <a:spcPct val="108000"/>
+              </a:lnSpc>
+              <a:buNone/>
+              <a:defRPr sz="1725" b="1"/>
+            </a:pPr>
+            <a:r>
+              <a:rPr sz="1725" b="1">
                 <a:solidFill>
                   <a:srgbClr val="000000"/>
                 </a:solidFill>
@@ -7226,7 +7282,7 @@
         </p:nvSpPr>
         <p:spPr>
           <a:xfrm xmlns:a="http://schemas.openxmlformats.org/drawingml/2006/main">
-            <a:off x="19050" y="4114800"/>
+            <a:off x="209550" y="4114800"/>
             <a:ext cx="1790700" cy="500000"/>
           </a:xfrm>
           <a:prstGeom xmlns:a="http://schemas.openxmlformats.org/drawingml/2006/main" prst="rect">
@@ -7241,7 +7297,11 @@
           <a:lstStyle xmlns:a="http://schemas.openxmlformats.org/drawingml/2006/main"/>
           <a:p xmlns:a="http://schemas.openxmlformats.org/drawingml/2006/main">
             <a:pPr algn="ctr">
-              <a:buNone/>
+              <a:lnSpc>
+                <a:spcPct val="108000"/>
+              </a:lnSpc>
+              <a:buNone/>
+              <a:defRPr sz="1350" b="0"/>
             </a:pPr>
             <a:r>
               <a:rPr sz="1350" b="0">
@@ -7398,10 +7458,14 @@
           <a:lstStyle xmlns:a="http://schemas.openxmlformats.org/drawingml/2006/main"/>
           <a:p xmlns:a="http://schemas.openxmlformats.org/drawingml/2006/main">
             <a:pPr algn="ctr">
-              <a:buNone/>
-            </a:pPr>
-            <a:r>
-              <a:rPr sz="2000" b="1">
+              <a:lnSpc>
+                <a:spcPct val="108000"/>
+              </a:lnSpc>
+              <a:buNone/>
+              <a:defRPr sz="1725" b="1"/>
+            </a:pPr>
+            <a:r>
+              <a:rPr sz="1725" b="1">
                 <a:solidFill>
                   <a:srgbClr val="000000"/>
                 </a:solidFill>
@@ -7445,7 +7509,11 @@
           <a:lstStyle xmlns:a="http://schemas.openxmlformats.org/drawingml/2006/main"/>
           <a:p xmlns:a="http://schemas.openxmlformats.org/drawingml/2006/main">
             <a:pPr algn="ctr">
-              <a:buNone/>
+              <a:lnSpc>
+                <a:spcPct val="108000"/>
+              </a:lnSpc>
+              <a:buNone/>
+              <a:defRPr sz="1350" b="0"/>
             </a:pPr>
             <a:r>
               <a:rPr sz="1350" b="0">
@@ -7602,10 +7670,14 @@
           <a:lstStyle xmlns:a="http://schemas.openxmlformats.org/drawingml/2006/main"/>
           <a:p xmlns:a="http://schemas.openxmlformats.org/drawingml/2006/main">
             <a:pPr algn="ctr">
-              <a:buNone/>
-            </a:pPr>
-            <a:r>
-              <a:rPr sz="2000" b="1">
+              <a:lnSpc>
+                <a:spcPct val="108000"/>
+              </a:lnSpc>
+              <a:buNone/>
+              <a:defRPr sz="1725" b="1"/>
+            </a:pPr>
+            <a:r>
+              <a:rPr sz="1725" b="1">
                 <a:solidFill>
                   <a:srgbClr val="000000"/>
                 </a:solidFill>
@@ -7649,7 +7721,11 @@
           <a:lstStyle xmlns:a="http://schemas.openxmlformats.org/drawingml/2006/main"/>
           <a:p xmlns:a="http://schemas.openxmlformats.org/drawingml/2006/main">
             <a:pPr algn="ctr">
-              <a:buNone/>
+              <a:lnSpc>
+                <a:spcPct val="108000"/>
+              </a:lnSpc>
+              <a:buNone/>
+              <a:defRPr sz="1350" b="0"/>
             </a:pPr>
             <a:r>
               <a:rPr sz="1350" b="0">
@@ -7806,10 +7882,14 @@
           <a:lstStyle xmlns:a="http://schemas.openxmlformats.org/drawingml/2006/main"/>
           <a:p xmlns:a="http://schemas.openxmlformats.org/drawingml/2006/main">
             <a:pPr algn="ctr">
-              <a:buNone/>
-            </a:pPr>
-            <a:r>
-              <a:rPr sz="2000" b="1">
+              <a:lnSpc>
+                <a:spcPct val="108000"/>
+              </a:lnSpc>
+              <a:buNone/>
+              <a:defRPr sz="1725" b="1"/>
+            </a:pPr>
+            <a:r>
+              <a:rPr sz="1725" b="1">
                 <a:solidFill>
                   <a:srgbClr val="000000"/>
                 </a:solidFill>
@@ -7853,7 +7933,11 @@
           <a:lstStyle xmlns:a="http://schemas.openxmlformats.org/drawingml/2006/main"/>
           <a:p xmlns:a="http://schemas.openxmlformats.org/drawingml/2006/main">
             <a:pPr algn="ctr">
-              <a:buNone/>
+              <a:lnSpc>
+                <a:spcPct val="108000"/>
+              </a:lnSpc>
+              <a:buNone/>
+              <a:defRPr sz="1350" b="0"/>
             </a:pPr>
             <a:r>
               <a:rPr sz="1350" b="0">
@@ -7940,7 +8024,7 @@
         </p:nvSpPr>
         <p:spPr>
           <a:xfrm xmlns:a="http://schemas.openxmlformats.org/drawingml/2006/main">
-            <a:off x="10287000" y="3314700"/>
+            <a:off x="10096500" y="3314700"/>
             <a:ext cx="1981200" cy="1504950"/>
           </a:xfrm>
           <a:prstGeom xmlns:a="http://schemas.openxmlformats.org/drawingml/2006/main" prst="rect">
@@ -7995,7 +8079,7 @@
         </p:nvSpPr>
         <p:spPr>
           <a:xfrm xmlns:a="http://schemas.openxmlformats.org/drawingml/2006/main">
-            <a:off x="10382250" y="3694700"/>
+            <a:off x="10191750" y="3694700"/>
             <a:ext cx="1790700" cy="400050"/>
           </a:xfrm>
           <a:prstGeom xmlns:a="http://schemas.openxmlformats.org/drawingml/2006/main" prst="rect">
@@ -8010,10 +8094,14 @@
           <a:lstStyle xmlns:a="http://schemas.openxmlformats.org/drawingml/2006/main"/>
           <a:p xmlns:a="http://schemas.openxmlformats.org/drawingml/2006/main">
             <a:pPr algn="ctr">
-              <a:buNone/>
-            </a:pPr>
-            <a:r>
-              <a:rPr sz="2000" b="1">
+              <a:lnSpc>
+                <a:spcPct val="108000"/>
+              </a:lnSpc>
+              <a:buNone/>
+              <a:defRPr sz="1725" b="1"/>
+            </a:pPr>
+            <a:r>
+              <a:rPr sz="1725" b="1">
                 <a:solidFill>
                   <a:srgbClr val="000000"/>
                 </a:solidFill>
@@ -8042,7 +8130,7 @@
         </p:nvSpPr>
         <p:spPr>
           <a:xfrm xmlns:a="http://schemas.openxmlformats.org/drawingml/2006/main">
-            <a:off x="10382250" y="4114800"/>
+            <a:off x="10191750" y="4114800"/>
             <a:ext cx="1790700" cy="500000"/>
           </a:xfrm>
           <a:prstGeom xmlns:a="http://schemas.openxmlformats.org/drawingml/2006/main" prst="rect">
@@ -8057,7 +8145,11 @@
           <a:lstStyle xmlns:a="http://schemas.openxmlformats.org/drawingml/2006/main"/>
           <a:p xmlns:a="http://schemas.openxmlformats.org/drawingml/2006/main">
             <a:pPr algn="ctr">
-              <a:buNone/>
+              <a:lnSpc>
+                <a:spcPct val="108000"/>
+              </a:lnSpc>
+              <a:buNone/>
+              <a:defRPr sz="1350" b="0"/>
             </a:pPr>
             <a:r>
               <a:rPr sz="1350" b="0">
@@ -8089,8 +8181,8 @@
         </p:nvSpPr>
         <p:spPr>
           <a:xfrm xmlns:a="http://schemas.openxmlformats.org/drawingml/2006/main">
-            <a:off x="1676400" y="5181600"/>
-            <a:ext cx="8839200" cy="600075"/>
+            <a:off x="1676400" y="5448300"/>
+            <a:ext cx="8839200" cy="457200"/>
           </a:xfrm>
           <a:prstGeom xmlns:a="http://schemas.openxmlformats.org/drawingml/2006/main" prst="rect">
             <a:avLst/>
@@ -8104,10 +8196,14 @@
           <a:lstStyle xmlns:a="http://schemas.openxmlformats.org/drawingml/2006/main"/>
           <a:p xmlns:a="http://schemas.openxmlformats.org/drawingml/2006/main">
             <a:pPr algn="ctr">
-              <a:buNone/>
-            </a:pPr>
-            <a:r>
-              <a:rPr sz="2100" b="1">
+              <a:lnSpc>
+                <a:spcPct val="105000"/>
+              </a:lnSpc>
+              <a:buNone/>
+              <a:defRPr sz="1500"/>
+            </a:pPr>
+            <a:r>
+              <a:rPr sz="1500" b="1">
                 <a:solidFill>
                   <a:srgbClr val="000000"/>
                 </a:solidFill>
@@ -10043,10 +10139,14 @@
           <a:lstStyle xmlns:a="http://schemas.openxmlformats.org/drawingml/2006/main"/>
           <a:p xmlns:a="http://schemas.openxmlformats.org/drawingml/2006/main">
             <a:pPr algn="l">
-              <a:buNone/>
-            </a:pPr>
-            <a:r>
-              <a:rPr sz="3750" b="1">
+              <a:lnSpc>
+                <a:spcPct val="98000"/>
+              </a:lnSpc>
+              <a:buNone/>
+              <a:defRPr sz="3525" b="1"/>
+            </a:pPr>
+            <a:r>
+              <a:rPr sz="3525" b="1">
                 <a:solidFill>
                   <a:srgbClr val="000000"/>
                 </a:solidFill>
@@ -10075,7 +10175,7 @@
         </p:nvSpPr>
         <p:spPr>
           <a:xfrm xmlns:a="http://schemas.openxmlformats.org/drawingml/2006/main">
-            <a:off x="-76200" y="3314700"/>
+            <a:off x="114300" y="3314700"/>
             <a:ext cx="1981200" cy="1504950"/>
           </a:xfrm>
           <a:prstGeom xmlns:a="http://schemas.openxmlformats.org/drawingml/2006/main" prst="rect">
@@ -10130,7 +10230,7 @@
         </p:nvSpPr>
         <p:spPr>
           <a:xfrm xmlns:a="http://schemas.openxmlformats.org/drawingml/2006/main">
-            <a:off x="19050" y="3694700"/>
+            <a:off x="209550" y="3694700"/>
             <a:ext cx="1790700" cy="400050"/>
           </a:xfrm>
           <a:prstGeom xmlns:a="http://schemas.openxmlformats.org/drawingml/2006/main" prst="rect">
@@ -10145,10 +10245,14 @@
           <a:lstStyle xmlns:a="http://schemas.openxmlformats.org/drawingml/2006/main"/>
           <a:p xmlns:a="http://schemas.openxmlformats.org/drawingml/2006/main">
             <a:pPr algn="ctr">
-              <a:buNone/>
-            </a:pPr>
-            <a:r>
-              <a:rPr sz="2000" b="1">
+              <a:lnSpc>
+                <a:spcPct val="108000"/>
+              </a:lnSpc>
+              <a:buNone/>
+              <a:defRPr sz="1725" b="1"/>
+            </a:pPr>
+            <a:r>
+              <a:rPr sz="1725" b="1">
                 <a:solidFill>
                   <a:srgbClr val="000000"/>
                 </a:solidFill>
@@ -10177,7 +10281,7 @@
         </p:nvSpPr>
         <p:spPr>
           <a:xfrm xmlns:a="http://schemas.openxmlformats.org/drawingml/2006/main">
-            <a:off x="19050" y="4114800"/>
+            <a:off x="209550" y="4114800"/>
             <a:ext cx="1790700" cy="500000"/>
           </a:xfrm>
           <a:prstGeom xmlns:a="http://schemas.openxmlformats.org/drawingml/2006/main" prst="rect">
@@ -10192,7 +10296,11 @@
           <a:lstStyle xmlns:a="http://schemas.openxmlformats.org/drawingml/2006/main"/>
           <a:p xmlns:a="http://schemas.openxmlformats.org/drawingml/2006/main">
             <a:pPr algn="ctr">
-              <a:buNone/>
+              <a:lnSpc>
+                <a:spcPct val="108000"/>
+              </a:lnSpc>
+              <a:buNone/>
+              <a:defRPr sz="1350" b="0"/>
             </a:pPr>
             <a:r>
               <a:rPr sz="1350" b="0">
@@ -10349,10 +10457,14 @@
           <a:lstStyle xmlns:a="http://schemas.openxmlformats.org/drawingml/2006/main"/>
           <a:p xmlns:a="http://schemas.openxmlformats.org/drawingml/2006/main">
             <a:pPr algn="ctr">
-              <a:buNone/>
-            </a:pPr>
-            <a:r>
-              <a:rPr sz="2000" b="1">
+              <a:lnSpc>
+                <a:spcPct val="108000"/>
+              </a:lnSpc>
+              <a:buNone/>
+              <a:defRPr sz="1725" b="1"/>
+            </a:pPr>
+            <a:r>
+              <a:rPr sz="1725" b="1">
                 <a:solidFill>
                   <a:srgbClr val="000000"/>
                 </a:solidFill>
@@ -10396,7 +10508,11 @@
           <a:lstStyle xmlns:a="http://schemas.openxmlformats.org/drawingml/2006/main"/>
           <a:p xmlns:a="http://schemas.openxmlformats.org/drawingml/2006/main">
             <a:pPr algn="ctr">
-              <a:buNone/>
+              <a:lnSpc>
+                <a:spcPct val="108000"/>
+              </a:lnSpc>
+              <a:buNone/>
+              <a:defRPr sz="1350" b="0"/>
             </a:pPr>
             <a:r>
               <a:rPr sz="1350" b="0">
@@ -10553,10 +10669,14 @@
           <a:lstStyle xmlns:a="http://schemas.openxmlformats.org/drawingml/2006/main"/>
           <a:p xmlns:a="http://schemas.openxmlformats.org/drawingml/2006/main">
             <a:pPr algn="ctr">
-              <a:buNone/>
-            </a:pPr>
-            <a:r>
-              <a:rPr sz="2000" b="1">
+              <a:lnSpc>
+                <a:spcPct val="108000"/>
+              </a:lnSpc>
+              <a:buNone/>
+              <a:defRPr sz="1725" b="1"/>
+            </a:pPr>
+            <a:r>
+              <a:rPr sz="1725" b="1">
                 <a:solidFill>
                   <a:srgbClr val="000000"/>
                 </a:solidFill>
@@ -10600,7 +10720,11 @@
           <a:lstStyle xmlns:a="http://schemas.openxmlformats.org/drawingml/2006/main"/>
           <a:p xmlns:a="http://schemas.openxmlformats.org/drawingml/2006/main">
             <a:pPr algn="ctr">
-              <a:buNone/>
+              <a:lnSpc>
+                <a:spcPct val="108000"/>
+              </a:lnSpc>
+              <a:buNone/>
+              <a:defRPr sz="1350" b="0"/>
             </a:pPr>
             <a:r>
               <a:rPr sz="1350" b="0">
@@ -10757,10 +10881,14 @@
           <a:lstStyle xmlns:a="http://schemas.openxmlformats.org/drawingml/2006/main"/>
           <a:p xmlns:a="http://schemas.openxmlformats.org/drawingml/2006/main">
             <a:pPr algn="ctr">
-              <a:buNone/>
-            </a:pPr>
-            <a:r>
-              <a:rPr sz="2000" b="1">
+              <a:lnSpc>
+                <a:spcPct val="108000"/>
+              </a:lnSpc>
+              <a:buNone/>
+              <a:defRPr sz="1725" b="1"/>
+            </a:pPr>
+            <a:r>
+              <a:rPr sz="1725" b="1">
                 <a:solidFill>
                   <a:srgbClr val="000000"/>
                 </a:solidFill>
@@ -10804,7 +10932,11 @@
           <a:lstStyle xmlns:a="http://schemas.openxmlformats.org/drawingml/2006/main"/>
           <a:p xmlns:a="http://schemas.openxmlformats.org/drawingml/2006/main">
             <a:pPr algn="ctr">
-              <a:buNone/>
+              <a:lnSpc>
+                <a:spcPct val="108000"/>
+              </a:lnSpc>
+              <a:buNone/>
+              <a:defRPr sz="1350" b="0"/>
             </a:pPr>
             <a:r>
               <a:rPr sz="1350" b="0">
@@ -10891,7 +11023,7 @@
         </p:nvSpPr>
         <p:spPr>
           <a:xfrm xmlns:a="http://schemas.openxmlformats.org/drawingml/2006/main">
-            <a:off x="10287000" y="3314700"/>
+            <a:off x="10096500" y="3314700"/>
             <a:ext cx="1981200" cy="1504950"/>
           </a:xfrm>
           <a:prstGeom xmlns:a="http://schemas.openxmlformats.org/drawingml/2006/main" prst="rect">
@@ -10946,7 +11078,7 @@
         </p:nvSpPr>
         <p:spPr>
           <a:xfrm xmlns:a="http://schemas.openxmlformats.org/drawingml/2006/main">
-            <a:off x="10382250" y="3694700"/>
+            <a:off x="10191750" y="3694700"/>
             <a:ext cx="1790700" cy="400050"/>
           </a:xfrm>
           <a:prstGeom xmlns:a="http://schemas.openxmlformats.org/drawingml/2006/main" prst="rect">
@@ -10961,10 +11093,14 @@
           <a:lstStyle xmlns:a="http://schemas.openxmlformats.org/drawingml/2006/main"/>
           <a:p xmlns:a="http://schemas.openxmlformats.org/drawingml/2006/main">
             <a:pPr algn="ctr">
-              <a:buNone/>
-            </a:pPr>
-            <a:r>
-              <a:rPr sz="2000" b="1">
+              <a:lnSpc>
+                <a:spcPct val="108000"/>
+              </a:lnSpc>
+              <a:buNone/>
+              <a:defRPr sz="1725" b="1"/>
+            </a:pPr>
+            <a:r>
+              <a:rPr sz="1725" b="1">
                 <a:solidFill>
                   <a:srgbClr val="000000"/>
                 </a:solidFill>
@@ -10993,7 +11129,7 @@
         </p:nvSpPr>
         <p:spPr>
           <a:xfrm xmlns:a="http://schemas.openxmlformats.org/drawingml/2006/main">
-            <a:off x="10382250" y="4114800"/>
+            <a:off x="10191750" y="4114800"/>
             <a:ext cx="1790700" cy="500000"/>
           </a:xfrm>
           <a:prstGeom xmlns:a="http://schemas.openxmlformats.org/drawingml/2006/main" prst="rect">
@@ -11008,7 +11144,11 @@
           <a:lstStyle xmlns:a="http://schemas.openxmlformats.org/drawingml/2006/main"/>
           <a:p xmlns:a="http://schemas.openxmlformats.org/drawingml/2006/main">
             <a:pPr algn="ctr">
-              <a:buNone/>
+              <a:lnSpc>
+                <a:spcPct val="108000"/>
+              </a:lnSpc>
+              <a:buNone/>
+              <a:defRPr sz="1350" b="0"/>
             </a:pPr>
             <a:r>
               <a:rPr sz="1350" b="0">
@@ -11040,8 +11180,8 @@
         </p:nvSpPr>
         <p:spPr>
           <a:xfrm xmlns:a="http://schemas.openxmlformats.org/drawingml/2006/main">
-            <a:off x="1676400" y="5181600"/>
-            <a:ext cx="8839200" cy="600075"/>
+            <a:off x="1676400" y="5448300"/>
+            <a:ext cx="8839200" cy="457200"/>
           </a:xfrm>
           <a:prstGeom xmlns:a="http://schemas.openxmlformats.org/drawingml/2006/main" prst="rect">
             <a:avLst/>
@@ -11055,10 +11195,14 @@
           <a:lstStyle xmlns:a="http://schemas.openxmlformats.org/drawingml/2006/main"/>
           <a:p xmlns:a="http://schemas.openxmlformats.org/drawingml/2006/main">
             <a:pPr algn="ctr">
-              <a:buNone/>
-            </a:pPr>
-            <a:r>
-              <a:rPr sz="2100" b="1">
+              <a:lnSpc>
+                <a:spcPct val="105000"/>
+              </a:lnSpc>
+              <a:buNone/>
+              <a:defRPr sz="1500"/>
+            </a:pPr>
+            <a:r>
+              <a:rPr sz="1500" b="1">
                 <a:solidFill>
                   <a:srgbClr val="000000"/>
                 </a:solidFill>
@@ -11945,10 +12089,14 @@
           <a:lstStyle xmlns:a="http://schemas.openxmlformats.org/drawingml/2006/main"/>
           <a:p xmlns:a="http://schemas.openxmlformats.org/drawingml/2006/main">
             <a:pPr algn="l">
-              <a:buNone/>
-            </a:pPr>
-            <a:r>
-              <a:rPr sz="3750" b="1">
+              <a:lnSpc>
+                <a:spcPct val="98000"/>
+              </a:lnSpc>
+              <a:buNone/>
+              <a:defRPr sz="3375" b="1"/>
+            </a:pPr>
+            <a:r>
+              <a:rPr sz="3375" b="1">
                 <a:solidFill>
                   <a:srgbClr val="000000"/>
                 </a:solidFill>
@@ -12039,10 +12187,14 @@
           <a:lstStyle xmlns:a="http://schemas.openxmlformats.org/drawingml/2006/main"/>
           <a:p xmlns:a="http://schemas.openxmlformats.org/drawingml/2006/main">
             <a:pPr algn="l">
-              <a:buNone/>
-            </a:pPr>
-            <a:r>
-              <a:rPr sz="1875" b="1">
+              <a:lnSpc>
+                <a:spcPct val="108000"/>
+              </a:lnSpc>
+              <a:buNone/>
+              <a:defRPr sz="1725" b="1"/>
+            </a:pPr>
+            <a:r>
+              <a:rPr sz="1725" b="1">
                 <a:solidFill>
                   <a:srgbClr val="60646C"/>
                 </a:solidFill>
@@ -12072,7 +12224,7 @@
         <p:spPr>
           <a:xfrm xmlns:a="http://schemas.openxmlformats.org/drawingml/2006/main">
             <a:off x="819150" y="3695700"/>
-            <a:ext cx="209550" cy="266700"/>
+            <a:ext cx="209550" cy="283921"/>
           </a:xfrm>
           <a:prstGeom xmlns:a="http://schemas.openxmlformats.org/drawingml/2006/main" prst="rect">
             <a:avLst/>
@@ -12086,10 +12238,14 @@
           <a:lstStyle xmlns:a="http://schemas.openxmlformats.org/drawingml/2006/main"/>
           <a:p xmlns:a="http://schemas.openxmlformats.org/drawingml/2006/main">
             <a:pPr algn="l">
-              <a:buNone/>
-            </a:pPr>
-            <a:r>
-              <a:rPr sz="1575" b="1">
+              <a:lnSpc>
+                <a:spcPct val="108000"/>
+              </a:lnSpc>
+              <a:buNone/>
+              <a:defRPr sz="1725" b="1"/>
+            </a:pPr>
+            <a:r>
+              <a:rPr sz="1725" b="1">
                 <a:solidFill>
                   <a:srgbClr val="3D8DFF"/>
                 </a:solidFill>
@@ -12133,10 +12289,14 @@
           <a:lstStyle xmlns:a="http://schemas.openxmlformats.org/drawingml/2006/main"/>
           <a:p xmlns:a="http://schemas.openxmlformats.org/drawingml/2006/main">
             <a:pPr algn="l">
-              <a:buNone/>
-            </a:pPr>
-            <a:r>
-              <a:rPr sz="1725" b="0">
+              <a:lnSpc>
+                <a:spcPct val="108000"/>
+              </a:lnSpc>
+              <a:buNone/>
+              <a:defRPr sz="1725" b="1"/>
+            </a:pPr>
+            <a:r>
+              <a:rPr sz="1725" b="1">
                 <a:solidFill>
                   <a:srgbClr val="000000"/>
                 </a:solidFill>
@@ -12180,10 +12340,14 @@
           <a:lstStyle xmlns:a="http://schemas.openxmlformats.org/drawingml/2006/main"/>
           <a:p xmlns:a="http://schemas.openxmlformats.org/drawingml/2006/main">
             <a:pPr algn="l">
-              <a:buNone/>
-            </a:pPr>
-            <a:r>
-              <a:rPr sz="1575" b="1">
+              <a:lnSpc>
+                <a:spcPct val="108000"/>
+              </a:lnSpc>
+              <a:buNone/>
+              <a:defRPr sz="1350" b="0"/>
+            </a:pPr>
+            <a:r>
+              <a:rPr sz="1350" b="0">
                 <a:solidFill>
                   <a:srgbClr val="3D8DFF"/>
                 </a:solidFill>
@@ -12227,10 +12391,14 @@
           <a:lstStyle xmlns:a="http://schemas.openxmlformats.org/drawingml/2006/main"/>
           <a:p xmlns:a="http://schemas.openxmlformats.org/drawingml/2006/main">
             <a:pPr algn="l">
-              <a:buNone/>
-            </a:pPr>
-            <a:r>
-              <a:rPr sz="1725" b="0">
+              <a:lnSpc>
+                <a:spcPct val="108000"/>
+              </a:lnSpc>
+              <a:buNone/>
+              <a:defRPr sz="1350" b="0"/>
+            </a:pPr>
+            <a:r>
+              <a:rPr sz="1350" b="0">
                 <a:solidFill>
                   <a:srgbClr val="000000"/>
                 </a:solidFill>
@@ -12274,10 +12442,14 @@
           <a:lstStyle xmlns:a="http://schemas.openxmlformats.org/drawingml/2006/main"/>
           <a:p xmlns:a="http://schemas.openxmlformats.org/drawingml/2006/main">
             <a:pPr algn="l">
-              <a:buNone/>
-            </a:pPr>
-            <a:r>
-              <a:rPr sz="1575" b="1">
+              <a:lnSpc>
+                <a:spcPct val="108000"/>
+              </a:lnSpc>
+              <a:buNone/>
+              <a:defRPr sz="1350" b="0"/>
+            </a:pPr>
+            <a:r>
+              <a:rPr sz="1350" b="0">
                 <a:solidFill>
                   <a:srgbClr val="3D8DFF"/>
                 </a:solidFill>
@@ -12321,10 +12493,14 @@
           <a:lstStyle xmlns:a="http://schemas.openxmlformats.org/drawingml/2006/main"/>
           <a:p xmlns:a="http://schemas.openxmlformats.org/drawingml/2006/main">
             <a:pPr algn="l">
-              <a:buNone/>
-            </a:pPr>
-            <a:r>
-              <a:rPr sz="1725" b="0">
+              <a:lnSpc>
+                <a:spcPct val="108000"/>
+              </a:lnSpc>
+              <a:buNone/>
+              <a:defRPr sz="1350" b="0"/>
+            </a:pPr>
+            <a:r>
+              <a:rPr sz="1350" b="0">
                 <a:solidFill>
                   <a:srgbClr val="000000"/>
                 </a:solidFill>
@@ -14975,10 +15151,14 @@
           <a:lstStyle xmlns:a="http://schemas.openxmlformats.org/drawingml/2006/main"/>
           <a:p xmlns:a="http://schemas.openxmlformats.org/drawingml/2006/main">
             <a:pPr algn="l">
-              <a:buNone/>
-            </a:pPr>
-            <a:r>
-              <a:rPr sz="3750" b="1">
+              <a:lnSpc>
+                <a:spcPct val="98000"/>
+              </a:lnSpc>
+              <a:buNone/>
+              <a:defRPr sz="3525" b="1"/>
+            </a:pPr>
+            <a:r>
+              <a:rPr sz="3525" b="1">
                 <a:solidFill>
                   <a:srgbClr val="000000"/>
                 </a:solidFill>
@@ -15007,7 +15187,7 @@
         </p:nvSpPr>
         <p:spPr>
           <a:xfrm xmlns:a="http://schemas.openxmlformats.org/drawingml/2006/main">
-            <a:off x="-76200" y="3314700"/>
+            <a:off x="114300" y="3314700"/>
             <a:ext cx="1981200" cy="1504950"/>
           </a:xfrm>
           <a:prstGeom xmlns:a="http://schemas.openxmlformats.org/drawingml/2006/main" prst="rect">
@@ -15062,7 +15242,7 @@
         </p:nvSpPr>
         <p:spPr>
           <a:xfrm xmlns:a="http://schemas.openxmlformats.org/drawingml/2006/main">
-            <a:off x="19050" y="3694700"/>
+            <a:off x="209550" y="3694700"/>
             <a:ext cx="1790700" cy="400050"/>
           </a:xfrm>
           <a:prstGeom xmlns:a="http://schemas.openxmlformats.org/drawingml/2006/main" prst="rect">
@@ -15077,10 +15257,14 @@
           <a:lstStyle xmlns:a="http://schemas.openxmlformats.org/drawingml/2006/main"/>
           <a:p xmlns:a="http://schemas.openxmlformats.org/drawingml/2006/main">
             <a:pPr algn="ctr">
-              <a:buNone/>
-            </a:pPr>
-            <a:r>
-              <a:rPr sz="2000" b="1">
+              <a:lnSpc>
+                <a:spcPct val="108000"/>
+              </a:lnSpc>
+              <a:buNone/>
+              <a:defRPr sz="1725" b="1"/>
+            </a:pPr>
+            <a:r>
+              <a:rPr sz="1725" b="1">
                 <a:solidFill>
                   <a:srgbClr val="000000"/>
                 </a:solidFill>
@@ -15109,7 +15293,7 @@
         </p:nvSpPr>
         <p:spPr>
           <a:xfrm xmlns:a="http://schemas.openxmlformats.org/drawingml/2006/main">
-            <a:off x="19050" y="4114800"/>
+            <a:off x="209550" y="4114800"/>
             <a:ext cx="1790700" cy="500000"/>
           </a:xfrm>
           <a:prstGeom xmlns:a="http://schemas.openxmlformats.org/drawingml/2006/main" prst="rect">
@@ -15124,7 +15308,11 @@
           <a:lstStyle xmlns:a="http://schemas.openxmlformats.org/drawingml/2006/main"/>
           <a:p xmlns:a="http://schemas.openxmlformats.org/drawingml/2006/main">
             <a:pPr algn="ctr">
-              <a:buNone/>
+              <a:lnSpc>
+                <a:spcPct val="108000"/>
+              </a:lnSpc>
+              <a:buNone/>
+              <a:defRPr sz="1350" b="0"/>
             </a:pPr>
             <a:r>
               <a:rPr sz="1350" b="0">
@@ -15281,10 +15469,14 @@
           <a:lstStyle xmlns:a="http://schemas.openxmlformats.org/drawingml/2006/main"/>
           <a:p xmlns:a="http://schemas.openxmlformats.org/drawingml/2006/main">
             <a:pPr algn="ctr">
-              <a:buNone/>
-            </a:pPr>
-            <a:r>
-              <a:rPr sz="2000" b="1">
+              <a:lnSpc>
+                <a:spcPct val="108000"/>
+              </a:lnSpc>
+              <a:buNone/>
+              <a:defRPr sz="1725" b="1"/>
+            </a:pPr>
+            <a:r>
+              <a:rPr sz="1725" b="1">
                 <a:solidFill>
                   <a:srgbClr val="000000"/>
                 </a:solidFill>
@@ -15328,7 +15520,11 @@
           <a:lstStyle xmlns:a="http://schemas.openxmlformats.org/drawingml/2006/main"/>
           <a:p xmlns:a="http://schemas.openxmlformats.org/drawingml/2006/main">
             <a:pPr algn="ctr">
-              <a:buNone/>
+              <a:lnSpc>
+                <a:spcPct val="108000"/>
+              </a:lnSpc>
+              <a:buNone/>
+              <a:defRPr sz="1350" b="0"/>
             </a:pPr>
             <a:r>
               <a:rPr sz="1350" b="0">
@@ -15485,10 +15681,14 @@
           <a:lstStyle xmlns:a="http://schemas.openxmlformats.org/drawingml/2006/main"/>
           <a:p xmlns:a="http://schemas.openxmlformats.org/drawingml/2006/main">
             <a:pPr algn="ctr">
-              <a:buNone/>
-            </a:pPr>
-            <a:r>
-              <a:rPr sz="2000" b="1">
+              <a:lnSpc>
+                <a:spcPct val="108000"/>
+              </a:lnSpc>
+              <a:buNone/>
+              <a:defRPr sz="1725" b="1"/>
+            </a:pPr>
+            <a:r>
+              <a:rPr sz="1725" b="1">
                 <a:solidFill>
                   <a:srgbClr val="000000"/>
                 </a:solidFill>
@@ -15532,7 +15732,11 @@
           <a:lstStyle xmlns:a="http://schemas.openxmlformats.org/drawingml/2006/main"/>
           <a:p xmlns:a="http://schemas.openxmlformats.org/drawingml/2006/main">
             <a:pPr algn="ctr">
-              <a:buNone/>
+              <a:lnSpc>
+                <a:spcPct val="108000"/>
+              </a:lnSpc>
+              <a:buNone/>
+              <a:defRPr sz="1350" b="0"/>
             </a:pPr>
             <a:r>
               <a:rPr sz="1350" b="0">
@@ -15689,10 +15893,14 @@
           <a:lstStyle xmlns:a="http://schemas.openxmlformats.org/drawingml/2006/main"/>
           <a:p xmlns:a="http://schemas.openxmlformats.org/drawingml/2006/main">
             <a:pPr algn="ctr">
-              <a:buNone/>
-            </a:pPr>
-            <a:r>
-              <a:rPr sz="2000" b="1">
+              <a:lnSpc>
+                <a:spcPct val="108000"/>
+              </a:lnSpc>
+              <a:buNone/>
+              <a:defRPr sz="1725" b="1"/>
+            </a:pPr>
+            <a:r>
+              <a:rPr sz="1725" b="1">
                 <a:solidFill>
                   <a:srgbClr val="000000"/>
                 </a:solidFill>
@@ -15736,7 +15944,11 @@
           <a:lstStyle xmlns:a="http://schemas.openxmlformats.org/drawingml/2006/main"/>
           <a:p xmlns:a="http://schemas.openxmlformats.org/drawingml/2006/main">
             <a:pPr algn="ctr">
-              <a:buNone/>
+              <a:lnSpc>
+                <a:spcPct val="108000"/>
+              </a:lnSpc>
+              <a:buNone/>
+              <a:defRPr sz="1350" b="0"/>
             </a:pPr>
             <a:r>
               <a:rPr sz="1350" b="0">
@@ -15823,7 +16035,7 @@
         </p:nvSpPr>
         <p:spPr>
           <a:xfrm xmlns:a="http://schemas.openxmlformats.org/drawingml/2006/main">
-            <a:off x="10287000" y="3314700"/>
+            <a:off x="10096500" y="3314700"/>
             <a:ext cx="1981200" cy="1504950"/>
           </a:xfrm>
           <a:prstGeom xmlns:a="http://schemas.openxmlformats.org/drawingml/2006/main" prst="rect">
@@ -15878,7 +16090,7 @@
         </p:nvSpPr>
         <p:spPr>
           <a:xfrm xmlns:a="http://schemas.openxmlformats.org/drawingml/2006/main">
-            <a:off x="10382250" y="3694700"/>
+            <a:off x="10191750" y="3694700"/>
             <a:ext cx="1790700" cy="400050"/>
           </a:xfrm>
           <a:prstGeom xmlns:a="http://schemas.openxmlformats.org/drawingml/2006/main" prst="rect">
@@ -15893,10 +16105,14 @@
           <a:lstStyle xmlns:a="http://schemas.openxmlformats.org/drawingml/2006/main"/>
           <a:p xmlns:a="http://schemas.openxmlformats.org/drawingml/2006/main">
             <a:pPr algn="ctr">
-              <a:buNone/>
-            </a:pPr>
-            <a:r>
-              <a:rPr sz="2000" b="1">
+              <a:lnSpc>
+                <a:spcPct val="108000"/>
+              </a:lnSpc>
+              <a:buNone/>
+              <a:defRPr sz="1725" b="1"/>
+            </a:pPr>
+            <a:r>
+              <a:rPr sz="1725" b="1">
                 <a:solidFill>
                   <a:srgbClr val="000000"/>
                 </a:solidFill>
@@ -15925,7 +16141,7 @@
         </p:nvSpPr>
         <p:spPr>
           <a:xfrm xmlns:a="http://schemas.openxmlformats.org/drawingml/2006/main">
-            <a:off x="10382250" y="4114800"/>
+            <a:off x="10191750" y="4114800"/>
             <a:ext cx="1790700" cy="500000"/>
           </a:xfrm>
           <a:prstGeom xmlns:a="http://schemas.openxmlformats.org/drawingml/2006/main" prst="rect">
@@ -15940,7 +16156,11 @@
           <a:lstStyle xmlns:a="http://schemas.openxmlformats.org/drawingml/2006/main"/>
           <a:p xmlns:a="http://schemas.openxmlformats.org/drawingml/2006/main">
             <a:pPr algn="ctr">
-              <a:buNone/>
+              <a:lnSpc>
+                <a:spcPct val="108000"/>
+              </a:lnSpc>
+              <a:buNone/>
+              <a:defRPr sz="1350" b="0"/>
             </a:pPr>
             <a:r>
               <a:rPr sz="1350" b="0">
@@ -15972,8 +16192,8 @@
         </p:nvSpPr>
         <p:spPr>
           <a:xfrm xmlns:a="http://schemas.openxmlformats.org/drawingml/2006/main">
-            <a:off x="1676400" y="5181600"/>
-            <a:ext cx="8839200" cy="600075"/>
+            <a:off x="1676400" y="5448300"/>
+            <a:ext cx="8839200" cy="457200"/>
           </a:xfrm>
           <a:prstGeom xmlns:a="http://schemas.openxmlformats.org/drawingml/2006/main" prst="rect">
             <a:avLst/>
@@ -15987,10 +16207,14 @@
           <a:lstStyle xmlns:a="http://schemas.openxmlformats.org/drawingml/2006/main"/>
           <a:p xmlns:a="http://schemas.openxmlformats.org/drawingml/2006/main">
             <a:pPr algn="ctr">
-              <a:buNone/>
-            </a:pPr>
-            <a:r>
-              <a:rPr sz="2100" b="1">
+              <a:lnSpc>
+                <a:spcPct val="105000"/>
+              </a:lnSpc>
+              <a:buNone/>
+              <a:defRPr sz="1500"/>
+            </a:pPr>
+            <a:r>
+              <a:rPr sz="1500" b="1">
                 <a:solidFill>
                   <a:srgbClr val="000000"/>
                 </a:solidFill>
@@ -16150,10 +16374,14 @@
           <a:lstStyle xmlns:a="http://schemas.openxmlformats.org/drawingml/2006/main"/>
           <a:p xmlns:a="http://schemas.openxmlformats.org/drawingml/2006/main">
             <a:pPr algn="l">
-              <a:buNone/>
-            </a:pPr>
-            <a:r>
-              <a:rPr sz="3750" b="1">
+              <a:lnSpc>
+                <a:spcPct val="98000"/>
+              </a:lnSpc>
+              <a:buNone/>
+              <a:defRPr sz="3525" b="1"/>
+            </a:pPr>
+            <a:r>
+              <a:rPr sz="3525" b="1">
                 <a:solidFill>
                   <a:srgbClr val="000000"/>
                 </a:solidFill>
@@ -16252,10 +16480,14 @@
           <a:lstStyle xmlns:a="http://schemas.openxmlformats.org/drawingml/2006/main"/>
           <a:p xmlns:a="http://schemas.openxmlformats.org/drawingml/2006/main">
             <a:pPr algn="l">
-              <a:buNone/>
-            </a:pPr>
-            <a:r>
-              <a:rPr sz="2000" b="1">
+              <a:lnSpc>
+                <a:spcPct val="108000"/>
+              </a:lnSpc>
+              <a:buNone/>
+              <a:defRPr sz="1725" b="1"/>
+            </a:pPr>
+            <a:r>
+              <a:rPr sz="1725" b="1">
                 <a:solidFill>
                   <a:srgbClr val="000000"/>
                 </a:solidFill>
@@ -16299,10 +16531,14 @@
           <a:lstStyle xmlns:a="http://schemas.openxmlformats.org/drawingml/2006/main"/>
           <a:p xmlns:a="http://schemas.openxmlformats.org/drawingml/2006/main">
             <a:pPr algn="l">
-              <a:buNone/>
-            </a:pPr>
-            <a:r>
-              <a:rPr sz="1575" b="0">
+              <a:lnSpc>
+                <a:spcPct val="112000"/>
+              </a:lnSpc>
+              <a:buNone/>
+              <a:defRPr sz="1350"/>
+            </a:pPr>
+            <a:r>
+              <a:rPr sz="1350" b="0">
                 <a:solidFill>
                   <a:srgbClr val="60646C"/>
                 </a:solidFill>
@@ -16401,10 +16637,14 @@
           <a:lstStyle xmlns:a="http://schemas.openxmlformats.org/drawingml/2006/main"/>
           <a:p xmlns:a="http://schemas.openxmlformats.org/drawingml/2006/main">
             <a:pPr algn="l">
-              <a:buNone/>
-            </a:pPr>
-            <a:r>
-              <a:rPr sz="2000" b="1">
+              <a:lnSpc>
+                <a:spcPct val="108000"/>
+              </a:lnSpc>
+              <a:buNone/>
+              <a:defRPr sz="1725" b="1"/>
+            </a:pPr>
+            <a:r>
+              <a:rPr sz="1725" b="1">
                 <a:solidFill>
                   <a:srgbClr val="000000"/>
                 </a:solidFill>
@@ -16448,10 +16688,14 @@
           <a:lstStyle xmlns:a="http://schemas.openxmlformats.org/drawingml/2006/main"/>
           <a:p xmlns:a="http://schemas.openxmlformats.org/drawingml/2006/main">
             <a:pPr algn="l">
-              <a:buNone/>
-            </a:pPr>
-            <a:r>
-              <a:rPr sz="1575" b="0">
+              <a:lnSpc>
+                <a:spcPct val="112000"/>
+              </a:lnSpc>
+              <a:buNone/>
+              <a:defRPr sz="1350"/>
+            </a:pPr>
+            <a:r>
+              <a:rPr sz="1350" b="0">
                 <a:solidFill>
                   <a:srgbClr val="60646C"/>
                 </a:solidFill>
@@ -16550,10 +16794,14 @@
           <a:lstStyle xmlns:a="http://schemas.openxmlformats.org/drawingml/2006/main"/>
           <a:p xmlns:a="http://schemas.openxmlformats.org/drawingml/2006/main">
             <a:pPr algn="l">
-              <a:buNone/>
-            </a:pPr>
-            <a:r>
-              <a:rPr sz="2000" b="1">
+              <a:lnSpc>
+                <a:spcPct val="108000"/>
+              </a:lnSpc>
+              <a:buNone/>
+              <a:defRPr sz="1725" b="1"/>
+            </a:pPr>
+            <a:r>
+              <a:rPr sz="1725" b="1">
                 <a:solidFill>
                   <a:srgbClr val="000000"/>
                 </a:solidFill>
@@ -16597,10 +16845,14 @@
           <a:lstStyle xmlns:a="http://schemas.openxmlformats.org/drawingml/2006/main"/>
           <a:p xmlns:a="http://schemas.openxmlformats.org/drawingml/2006/main">
             <a:pPr algn="l">
-              <a:buNone/>
-            </a:pPr>
-            <a:r>
-              <a:rPr sz="1575" b="0">
+              <a:lnSpc>
+                <a:spcPct val="112000"/>
+              </a:lnSpc>
+              <a:buNone/>
+              <a:defRPr sz="1350"/>
+            </a:pPr>
+            <a:r>
+              <a:rPr sz="1350" b="0">
                 <a:solidFill>
                   <a:srgbClr val="60646C"/>
                 </a:solidFill>
@@ -16629,8 +16881,8 @@
         </p:nvSpPr>
         <p:spPr>
           <a:xfrm xmlns:a="http://schemas.openxmlformats.org/drawingml/2006/main">
-            <a:off x="1676400" y="5181600"/>
-            <a:ext cx="8839200" cy="640080"/>
+            <a:off x="1676400" y="5448300"/>
+            <a:ext cx="8839200" cy="457200"/>
           </a:xfrm>
           <a:prstGeom xmlns:a="http://schemas.openxmlformats.org/drawingml/2006/main" prst="rect">
             <a:avLst/>
@@ -16644,10 +16896,14 @@
           <a:lstStyle xmlns:a="http://schemas.openxmlformats.org/drawingml/2006/main"/>
           <a:p xmlns:a="http://schemas.openxmlformats.org/drawingml/2006/main">
             <a:pPr algn="ctr">
-              <a:buNone/>
-            </a:pPr>
-            <a:r>
-              <a:rPr sz="2100" b="1">
+              <a:lnSpc>
+                <a:spcPct val="105000"/>
+              </a:lnSpc>
+              <a:buNone/>
+              <a:defRPr sz="1500"/>
+            </a:pPr>
+            <a:r>
+              <a:rPr sz="1500" b="1">
                 <a:solidFill>
                   <a:srgbClr val="000000"/>
                 </a:solidFill>
